--- a/Backend/services/pptx-generator-service/slides/pickleball/secao_iluminacao.pptx
+++ b/Backend/services/pptx-generator-service/slides/pickleball/secao_iluminacao.pptx
@@ -3299,7 +3299,7 @@
                 <a:latin typeface="Poppins"/>
                 <a:cs typeface="Poppins"/>
               </a:rPr>
-              <a:t>quantidade_cruzetas }} cruzetas simples para {{ quantidade_postes_iluminacao }}</a:t>
+              <a:t>quantidade_cruzetas }} cruzetas simples para {{ quantidade_postes_iluminacao }}</a:t>
             </a:r>
             <a:r>
               <a:rPr lang="pt-BR" sz="1200" dirty="0">
